--- a/public/judges-deck.pptx
+++ b/public/judges-deck.pptx
@@ -4,6 +4,9 @@
   <p:sldMasterIdLst>
     <p:sldMasterId id="2147483648" r:id="rId1"/>
   </p:sldMasterIdLst>
+  <p:notesMasterIdLst>
+    <p:notesMasterId r:id="rId15"/>
+  </p:notesMasterIdLst>
   <p:sldIdLst>
     <p:sldId id="256" r:id="rId2"/>
     <p:sldId id="257" r:id="rId3"/>
@@ -19,9 +22,6 @@
     <p:sldId id="267" r:id="rId13"/>
     <p:sldId id="268" r:id="rId14"/>
   </p:sldIdLst>
-  <p:notesMasterIdLst>
-    <p:notesMasterId r:id="rId15"/>
-  </p:notesMasterIdLst>
   <p:sldSz cx="12191695" cy="6858000"/>
   <p:notesSz cx="6858000" cy="12191695"/>
   <p:defaultTextStyle>

--- a/public/judges-deck.pptx
+++ b/public/judges-deck.pptx
@@ -5,7 +5,7 @@
     <p:sldMasterId id="2147483648" r:id="rId1"/>
   </p:sldMasterIdLst>
   <p:notesMasterIdLst>
-    <p:notesMasterId r:id="rId15"/>
+    <p:notesMasterId r:id="rId16"/>
   </p:notesMasterIdLst>
   <p:sldIdLst>
     <p:sldId id="256" r:id="rId2"/>
@@ -21,6 +21,7 @@
     <p:sldId id="266" r:id="rId12"/>
     <p:sldId id="267" r:id="rId13"/>
     <p:sldId id="268" r:id="rId14"/>
+    <p:sldId id="269" r:id="rId15"/>
   </p:sldIdLst>
   <p:sldSz cx="12191695" cy="6858000"/>
   <p:notesSz cx="6858000" cy="12191695"/>
@@ -890,6 +891,94 @@
             <a:fld id="{F7021451-1387-4CA6-816F-3879F97B5CBC}" type="slidenum">
               <a:rPr lang="en-US"/>
               <a:t>13</a:t>
+            </a:fld>
+            <a:endParaRPr lang="en-US"/>
+          </a:p>
+        </p:txBody>
+      </p:sp>
+    </p:spTree>
+    <p:extLst>
+      <p:ext uri="{BB962C8B-B14F-4D97-AF65-F5344CB8AC3E}">
+        <p14:creationId xmlns:p14="http://schemas.microsoft.com/office/powerpoint/2010/main" val="1024086991"/>
+      </p:ext>
+    </p:extLst>
+  </p:cSld>
+  <p:clrMapOvr>
+    <a:masterClrMapping/>
+  </p:clrMapOvr>
+</p:notes>
+</file>
+
+<file path=ppt/notesSlides/notesSlide14.xml><?xml version="1.0" encoding="utf-8"?>
+<p:notes xmlns:a="http://schemas.openxmlformats.org/drawingml/2006/main" xmlns:r="http://schemas.openxmlformats.org/officeDocument/2006/relationships" xmlns:p="http://schemas.openxmlformats.org/presentationml/2006/main">
+  <p:cSld>
+    <p:spTree>
+      <p:nvGrpSpPr>
+        <p:cNvPr id="1" name=""/>
+        <p:cNvGrpSpPr/>
+        <p:nvPr/>
+      </p:nvGrpSpPr>
+      <p:grpSpPr>
+        <a:xfrm>
+          <a:off x="0" y="0"/>
+          <a:ext cx="0" cy="0"/>
+          <a:chOff x="0" y="0"/>
+          <a:chExt cx="0" cy="0"/>
+        </a:xfrm>
+      </p:grpSpPr>
+      <p:sp>
+        <p:nvSpPr>
+          <p:cNvPr id="2" name="Slide Image Placeholder 1"/>
+          <p:cNvSpPr>
+            <a:spLocks noGrp="1" noRot="1" noChangeAspect="1"/>
+          </p:cNvSpPr>
+          <p:nvPr>
+            <p:ph type="sldImg"/>
+          </p:nvPr>
+        </p:nvSpPr>
+        <p:spPr/>
+      </p:sp>
+      <p:sp>
+        <p:nvSpPr>
+          <p:cNvPr id="3" name="Notes Placeholder 2"/>
+          <p:cNvSpPr>
+            <a:spLocks noGrp="1"/>
+          </p:cNvSpPr>
+          <p:nvPr>
+            <p:ph type="body" idx="1"/>
+          </p:nvPr>
+        </p:nvSpPr>
+        <p:spPr/>
+        <p:txBody>
+          <a:bodyPr/>
+          <a:lstStyle/>
+          <a:p>
+            <a:r>
+              <a:rPr lang="en-US" dirty="0"/>
+              <a:t/>
+            </a:r>
+            <a:endParaRPr lang="en-US" dirty="0"/>
+          </a:p>
+        </p:txBody>
+      </p:sp>
+      <p:sp>
+        <p:nvSpPr>
+          <p:cNvPr id="4" name="Slide Number Placeholder 3"/>
+          <p:cNvSpPr>
+            <a:spLocks noGrp="1"/>
+          </p:cNvSpPr>
+          <p:nvPr>
+            <p:ph type="sldNum" sz="quarter" idx="10"/>
+          </p:nvPr>
+        </p:nvSpPr>
+        <p:spPr/>
+        <p:txBody>
+          <a:bodyPr/>
+          <a:lstStyle/>
+          <a:p>
+            <a:fld id="{F7021451-1387-4CA6-816F-3879F97B5CBC}" type="slidenum">
+              <a:rPr lang="en-US"/>
+              <a:t>14</a:t>
             </a:fld>
             <a:endParaRPr lang="en-US"/>
           </a:p>
@@ -2199,6 +2288,62 @@
 </p:sld>
 </file>
 
+<file path=ppt/slides/slide14.xml><?xml version="1.0" encoding="utf-8"?>
+<p:sld xmlns:a="http://schemas.openxmlformats.org/drawingml/2006/main" xmlns:r="http://schemas.openxmlformats.org/officeDocument/2006/relationships" xmlns:p="http://schemas.openxmlformats.org/presentationml/2006/main">
+  <p:cSld name="Slide 14">
+    <p:bg>
+      <p:bgPr>
+        <a:solidFill>
+          <a:srgbClr val="07070F"/>
+        </a:solidFill>
+      </p:bgPr>
+    </p:bg>
+    <p:spTree>
+      <p:nvGrpSpPr>
+        <p:cNvPr id="1" name=""/>
+        <p:cNvGrpSpPr/>
+        <p:nvPr/>
+      </p:nvGrpSpPr>
+      <p:grpSpPr>
+        <a:xfrm>
+          <a:off x="0" y="0"/>
+          <a:ext cx="0" cy="0"/>
+          <a:chOff x="0" y="0"/>
+          <a:chExt cx="0" cy="0"/>
+        </a:xfrm>
+      </p:grpSpPr>
+      <p:pic>
+        <p:nvPicPr>
+          <p:cNvPr id="2" name="Image 0" descr="preencoded.png">    </p:cNvPr>
+          <p:cNvPicPr>
+            <a:picLocks noChangeAspect="1"/>
+          </p:cNvPicPr>
+          <p:nvPr/>
+        </p:nvPicPr>
+        <p:blipFill>
+          <a:blip r:embed="rId1"/>
+          <a:stretch>
+            <a:fillRect/>
+          </a:stretch>
+        </p:blipFill>
+        <p:spPr>
+          <a:xfrm>
+            <a:off x="0" y="0"/>
+            <a:ext cx="12191695" cy="6858000"/>
+          </a:xfrm>
+          <a:prstGeom prst="rect">
+            <a:avLst/>
+          </a:prstGeom>
+        </p:spPr>
+      </p:pic>
+    </p:spTree>
+  </p:cSld>
+  <p:clrMapOvr>
+    <a:masterClrMapping/>
+  </p:clrMapOvr>
+</p:sld>
+</file>
+
 <file path=ppt/slides/slide2.xml><?xml version="1.0" encoding="utf-8"?>
 <p:sld xmlns:a="http://schemas.openxmlformats.org/drawingml/2006/main" xmlns:r="http://schemas.openxmlformats.org/officeDocument/2006/relationships" xmlns:p="http://schemas.openxmlformats.org/presentationml/2006/main">
   <p:cSld name="Slide 2">

--- a/public/judges-deck.pptx
+++ b/public/judges-deck.pptx
@@ -20,6 +20,8 @@
     <p:sldId id="268" r:id="rId19"/>
     <p:sldId id="269" r:id="rId20"/>
     <p:sldId id="270" r:id="rId21"/>
+    <p:sldId id="271" r:id="rId22"/>
+    <p:sldId id="272" r:id="rId23"/>
   </p:sldIdLst>
   <p:sldSz cx="12191695" cy="6858000" type="screen4x3"/>
   <p:notesSz cx="6858000" cy="9144000"/>
@@ -3104,7 +3106,7 @@
       <p:grpSpPr/>
       <p:pic>
         <p:nvPicPr>
-          <p:cNvPr id="2" name="Picture 1" descr="slide01.png"/>
+          <p:cNvPr id="2" name="Picture 1" descr="slide-01.png"/>
           <p:cNvPicPr>
             <a:picLocks noChangeAspect="1"/>
           </p:cNvPicPr>
@@ -3146,7 +3148,7 @@
       <p:grpSpPr/>
       <p:pic>
         <p:nvPicPr>
-          <p:cNvPr id="2" name="Picture 1" descr="slide10.png"/>
+          <p:cNvPr id="2" name="Picture 1" descr="slide-10.png"/>
           <p:cNvPicPr>
             <a:picLocks noChangeAspect="1"/>
           </p:cNvPicPr>
@@ -3188,7 +3190,7 @@
       <p:grpSpPr/>
       <p:pic>
         <p:nvPicPr>
-          <p:cNvPr id="2" name="Picture 1" descr="slide11.png"/>
+          <p:cNvPr id="2" name="Picture 1" descr="slide-11.png"/>
           <p:cNvPicPr>
             <a:picLocks noChangeAspect="1"/>
           </p:cNvPicPr>
@@ -3230,7 +3232,7 @@
       <p:grpSpPr/>
       <p:pic>
         <p:nvPicPr>
-          <p:cNvPr id="2" name="Picture 1" descr="slide12.png"/>
+          <p:cNvPr id="2" name="Picture 1" descr="slide-12.png"/>
           <p:cNvPicPr>
             <a:picLocks noChangeAspect="1"/>
           </p:cNvPicPr>
@@ -3272,7 +3274,7 @@
       <p:grpSpPr/>
       <p:pic>
         <p:nvPicPr>
-          <p:cNvPr id="2" name="Picture 1" descr="slide13.png"/>
+          <p:cNvPr id="2" name="Picture 1" descr="slide-13.png"/>
           <p:cNvPicPr>
             <a:picLocks noChangeAspect="1"/>
           </p:cNvPicPr>
@@ -3314,7 +3316,7 @@
       <p:grpSpPr/>
       <p:pic>
         <p:nvPicPr>
-          <p:cNvPr id="2" name="Picture 1" descr="slide14.png"/>
+          <p:cNvPr id="2" name="Picture 1" descr="slide-14.png"/>
           <p:cNvPicPr>
             <a:picLocks noChangeAspect="1"/>
           </p:cNvPicPr>
@@ -3356,7 +3358,91 @@
       <p:grpSpPr/>
       <p:pic>
         <p:nvPicPr>
-          <p:cNvPr id="2" name="Picture 1" descr="slide15.png"/>
+          <p:cNvPr id="2" name="Picture 1" descr="slide-15.png"/>
+          <p:cNvPicPr>
+            <a:picLocks noChangeAspect="1"/>
+          </p:cNvPicPr>
+          <p:nvPr/>
+        </p:nvPicPr>
+        <p:blipFill>
+          <a:blip r:embed="rId2"/>
+          <a:stretch>
+            <a:fillRect/>
+          </a:stretch>
+        </p:blipFill>
+        <p:spPr>
+          <a:xfrm>
+            <a:off x="0" y="0"/>
+            <a:ext cx="12191695" cy="6858000"/>
+          </a:xfrm>
+          <a:prstGeom prst="rect">
+            <a:avLst/>
+          </a:prstGeom>
+        </p:spPr>
+      </p:pic>
+    </p:spTree>
+  </p:cSld>
+  <p:clrMapOvr>
+    <a:masterClrMapping/>
+  </p:clrMapOvr>
+</p:sld>
+</file>
+
+<file path=ppt/slides/slide16.xml><?xml version="1.0" encoding="utf-8"?>
+<p:sld xmlns:a="http://schemas.openxmlformats.org/drawingml/2006/main" xmlns:p="http://schemas.openxmlformats.org/presentationml/2006/main" xmlns:r="http://schemas.openxmlformats.org/officeDocument/2006/relationships">
+  <p:cSld>
+    <p:spTree>
+      <p:nvGrpSpPr>
+        <p:cNvPr id="1" name=""/>
+        <p:cNvGrpSpPr/>
+        <p:nvPr/>
+      </p:nvGrpSpPr>
+      <p:grpSpPr/>
+      <p:pic>
+        <p:nvPicPr>
+          <p:cNvPr id="2" name="Picture 1" descr="slide-16.png"/>
+          <p:cNvPicPr>
+            <a:picLocks noChangeAspect="1"/>
+          </p:cNvPicPr>
+          <p:nvPr/>
+        </p:nvPicPr>
+        <p:blipFill>
+          <a:blip r:embed="rId2"/>
+          <a:stretch>
+            <a:fillRect/>
+          </a:stretch>
+        </p:blipFill>
+        <p:spPr>
+          <a:xfrm>
+            <a:off x="0" y="0"/>
+            <a:ext cx="12191695" cy="6858000"/>
+          </a:xfrm>
+          <a:prstGeom prst="rect">
+            <a:avLst/>
+          </a:prstGeom>
+        </p:spPr>
+      </p:pic>
+    </p:spTree>
+  </p:cSld>
+  <p:clrMapOvr>
+    <a:masterClrMapping/>
+  </p:clrMapOvr>
+</p:sld>
+</file>
+
+<file path=ppt/slides/slide17.xml><?xml version="1.0" encoding="utf-8"?>
+<p:sld xmlns:a="http://schemas.openxmlformats.org/drawingml/2006/main" xmlns:p="http://schemas.openxmlformats.org/presentationml/2006/main" xmlns:r="http://schemas.openxmlformats.org/officeDocument/2006/relationships">
+  <p:cSld>
+    <p:spTree>
+      <p:nvGrpSpPr>
+        <p:cNvPr id="1" name=""/>
+        <p:cNvGrpSpPr/>
+        <p:nvPr/>
+      </p:nvGrpSpPr>
+      <p:grpSpPr/>
+      <p:pic>
+        <p:nvPicPr>
+          <p:cNvPr id="2" name="Picture 1" descr="slide-17.png"/>
           <p:cNvPicPr>
             <a:picLocks noChangeAspect="1"/>
           </p:cNvPicPr>
@@ -3398,7 +3484,7 @@
       <p:grpSpPr/>
       <p:pic>
         <p:nvPicPr>
-          <p:cNvPr id="2" name="Picture 1" descr="slide02.png"/>
+          <p:cNvPr id="2" name="Picture 1" descr="slide-02.png"/>
           <p:cNvPicPr>
             <a:picLocks noChangeAspect="1"/>
           </p:cNvPicPr>
@@ -3440,7 +3526,7 @@
       <p:grpSpPr/>
       <p:pic>
         <p:nvPicPr>
-          <p:cNvPr id="2" name="Picture 1" descr="slide03.png"/>
+          <p:cNvPr id="2" name="Picture 1" descr="slide-03.png"/>
           <p:cNvPicPr>
             <a:picLocks noChangeAspect="1"/>
           </p:cNvPicPr>
@@ -3482,7 +3568,7 @@
       <p:grpSpPr/>
       <p:pic>
         <p:nvPicPr>
-          <p:cNvPr id="2" name="Picture 1" descr="slide04.png"/>
+          <p:cNvPr id="2" name="Picture 1" descr="slide-04.png"/>
           <p:cNvPicPr>
             <a:picLocks noChangeAspect="1"/>
           </p:cNvPicPr>
@@ -3524,7 +3610,7 @@
       <p:grpSpPr/>
       <p:pic>
         <p:nvPicPr>
-          <p:cNvPr id="2" name="Picture 1" descr="slide05.png"/>
+          <p:cNvPr id="2" name="Picture 1" descr="slide-05.png"/>
           <p:cNvPicPr>
             <a:picLocks noChangeAspect="1"/>
           </p:cNvPicPr>
@@ -3566,7 +3652,7 @@
       <p:grpSpPr/>
       <p:pic>
         <p:nvPicPr>
-          <p:cNvPr id="2" name="Picture 1" descr="slide06.png"/>
+          <p:cNvPr id="2" name="Picture 1" descr="slide-06.png"/>
           <p:cNvPicPr>
             <a:picLocks noChangeAspect="1"/>
           </p:cNvPicPr>
@@ -3608,7 +3694,7 @@
       <p:grpSpPr/>
       <p:pic>
         <p:nvPicPr>
-          <p:cNvPr id="2" name="Picture 1" descr="slide07.png"/>
+          <p:cNvPr id="2" name="Picture 1" descr="slide-07.png"/>
           <p:cNvPicPr>
             <a:picLocks noChangeAspect="1"/>
           </p:cNvPicPr>
@@ -3650,7 +3736,7 @@
       <p:grpSpPr/>
       <p:pic>
         <p:nvPicPr>
-          <p:cNvPr id="2" name="Picture 1" descr="slide08.png"/>
+          <p:cNvPr id="2" name="Picture 1" descr="slide-08.png"/>
           <p:cNvPicPr>
             <a:picLocks noChangeAspect="1"/>
           </p:cNvPicPr>
@@ -3692,7 +3778,7 @@
       <p:grpSpPr/>
       <p:pic>
         <p:nvPicPr>
-          <p:cNvPr id="2" name="Picture 1" descr="slide09.png"/>
+          <p:cNvPr id="2" name="Picture 1" descr="slide-09.png"/>
           <p:cNvPicPr>
             <a:picLocks noChangeAspect="1"/>
           </p:cNvPicPr>

--- a/public/judges-deck.pptx
+++ b/public/judges-deck.pptx
@@ -22,6 +22,8 @@
     <p:sldId id="270" r:id="rId21"/>
     <p:sldId id="271" r:id="rId22"/>
     <p:sldId id="272" r:id="rId23"/>
+    <p:sldId id="273" r:id="rId24"/>
+    <p:sldId id="274" r:id="rId25"/>
   </p:sldIdLst>
   <p:sldSz cx="12191695" cy="6858000" type="screen4x3"/>
   <p:notesSz cx="6858000" cy="9144000"/>
@@ -3106,7 +3108,7 @@
       <p:grpSpPr/>
       <p:pic>
         <p:nvPicPr>
-          <p:cNvPr id="2" name="Picture 1" descr="slide-01.png"/>
+          <p:cNvPr id="2" name="Picture 1" descr="slide-00.png"/>
           <p:cNvPicPr>
             <a:picLocks noChangeAspect="1"/>
           </p:cNvPicPr>
@@ -3148,7 +3150,7 @@
       <p:grpSpPr/>
       <p:pic>
         <p:nvPicPr>
-          <p:cNvPr id="2" name="Picture 1" descr="slide-10.png"/>
+          <p:cNvPr id="2" name="Picture 1" descr="slide-09.png"/>
           <p:cNvPicPr>
             <a:picLocks noChangeAspect="1"/>
           </p:cNvPicPr>
@@ -3190,7 +3192,7 @@
       <p:grpSpPr/>
       <p:pic>
         <p:nvPicPr>
-          <p:cNvPr id="2" name="Picture 1" descr="slide-11.png"/>
+          <p:cNvPr id="2" name="Picture 1" descr="slide-10.png"/>
           <p:cNvPicPr>
             <a:picLocks noChangeAspect="1"/>
           </p:cNvPicPr>
@@ -3232,7 +3234,7 @@
       <p:grpSpPr/>
       <p:pic>
         <p:nvPicPr>
-          <p:cNvPr id="2" name="Picture 1" descr="slide-12.png"/>
+          <p:cNvPr id="2" name="Picture 1" descr="slide-11.png"/>
           <p:cNvPicPr>
             <a:picLocks noChangeAspect="1"/>
           </p:cNvPicPr>
@@ -3274,7 +3276,7 @@
       <p:grpSpPr/>
       <p:pic>
         <p:nvPicPr>
-          <p:cNvPr id="2" name="Picture 1" descr="slide-13.png"/>
+          <p:cNvPr id="2" name="Picture 1" descr="slide-12.png"/>
           <p:cNvPicPr>
             <a:picLocks noChangeAspect="1"/>
           </p:cNvPicPr>
@@ -3316,7 +3318,7 @@
       <p:grpSpPr/>
       <p:pic>
         <p:nvPicPr>
-          <p:cNvPr id="2" name="Picture 1" descr="slide-14.png"/>
+          <p:cNvPr id="2" name="Picture 1" descr="slide-13.png"/>
           <p:cNvPicPr>
             <a:picLocks noChangeAspect="1"/>
           </p:cNvPicPr>
@@ -3358,7 +3360,7 @@
       <p:grpSpPr/>
       <p:pic>
         <p:nvPicPr>
-          <p:cNvPr id="2" name="Picture 1" descr="slide-15.png"/>
+          <p:cNvPr id="2" name="Picture 1" descr="slide-14.png"/>
           <p:cNvPicPr>
             <a:picLocks noChangeAspect="1"/>
           </p:cNvPicPr>
@@ -3400,7 +3402,7 @@
       <p:grpSpPr/>
       <p:pic>
         <p:nvPicPr>
-          <p:cNvPr id="2" name="Picture 1" descr="slide-16.png"/>
+          <p:cNvPr id="2" name="Picture 1" descr="slide-15.png"/>
           <p:cNvPicPr>
             <a:picLocks noChangeAspect="1"/>
           </p:cNvPicPr>
@@ -3442,7 +3444,91 @@
       <p:grpSpPr/>
       <p:pic>
         <p:nvPicPr>
+          <p:cNvPr id="2" name="Picture 1" descr="slide-16.png"/>
+          <p:cNvPicPr>
+            <a:picLocks noChangeAspect="1"/>
+          </p:cNvPicPr>
+          <p:nvPr/>
+        </p:nvPicPr>
+        <p:blipFill>
+          <a:blip r:embed="rId2"/>
+          <a:stretch>
+            <a:fillRect/>
+          </a:stretch>
+        </p:blipFill>
+        <p:spPr>
+          <a:xfrm>
+            <a:off x="0" y="0"/>
+            <a:ext cx="12191695" cy="6858000"/>
+          </a:xfrm>
+          <a:prstGeom prst="rect">
+            <a:avLst/>
+          </a:prstGeom>
+        </p:spPr>
+      </p:pic>
+    </p:spTree>
+  </p:cSld>
+  <p:clrMapOvr>
+    <a:masterClrMapping/>
+  </p:clrMapOvr>
+</p:sld>
+</file>
+
+<file path=ppt/slides/slide18.xml><?xml version="1.0" encoding="utf-8"?>
+<p:sld xmlns:a="http://schemas.openxmlformats.org/drawingml/2006/main" xmlns:p="http://schemas.openxmlformats.org/presentationml/2006/main" xmlns:r="http://schemas.openxmlformats.org/officeDocument/2006/relationships">
+  <p:cSld>
+    <p:spTree>
+      <p:nvGrpSpPr>
+        <p:cNvPr id="1" name=""/>
+        <p:cNvGrpSpPr/>
+        <p:nvPr/>
+      </p:nvGrpSpPr>
+      <p:grpSpPr/>
+      <p:pic>
+        <p:nvPicPr>
           <p:cNvPr id="2" name="Picture 1" descr="slide-17.png"/>
+          <p:cNvPicPr>
+            <a:picLocks noChangeAspect="1"/>
+          </p:cNvPicPr>
+          <p:nvPr/>
+        </p:nvPicPr>
+        <p:blipFill>
+          <a:blip r:embed="rId2"/>
+          <a:stretch>
+            <a:fillRect/>
+          </a:stretch>
+        </p:blipFill>
+        <p:spPr>
+          <a:xfrm>
+            <a:off x="0" y="0"/>
+            <a:ext cx="12191695" cy="6858000"/>
+          </a:xfrm>
+          <a:prstGeom prst="rect">
+            <a:avLst/>
+          </a:prstGeom>
+        </p:spPr>
+      </p:pic>
+    </p:spTree>
+  </p:cSld>
+  <p:clrMapOvr>
+    <a:masterClrMapping/>
+  </p:clrMapOvr>
+</p:sld>
+</file>
+
+<file path=ppt/slides/slide19.xml><?xml version="1.0" encoding="utf-8"?>
+<p:sld xmlns:a="http://schemas.openxmlformats.org/drawingml/2006/main" xmlns:p="http://schemas.openxmlformats.org/presentationml/2006/main" xmlns:r="http://schemas.openxmlformats.org/officeDocument/2006/relationships">
+  <p:cSld>
+    <p:spTree>
+      <p:nvGrpSpPr>
+        <p:cNvPr id="1" name=""/>
+        <p:cNvGrpSpPr/>
+        <p:nvPr/>
+      </p:nvGrpSpPr>
+      <p:grpSpPr/>
+      <p:pic>
+        <p:nvPicPr>
+          <p:cNvPr id="2" name="Picture 1" descr="slide-18.png"/>
           <p:cNvPicPr>
             <a:picLocks noChangeAspect="1"/>
           </p:cNvPicPr>
@@ -3484,7 +3570,7 @@
       <p:grpSpPr/>
       <p:pic>
         <p:nvPicPr>
-          <p:cNvPr id="2" name="Picture 1" descr="slide-02.png"/>
+          <p:cNvPr id="2" name="Picture 1" descr="slide-01.png"/>
           <p:cNvPicPr>
             <a:picLocks noChangeAspect="1"/>
           </p:cNvPicPr>
@@ -3526,7 +3612,7 @@
       <p:grpSpPr/>
       <p:pic>
         <p:nvPicPr>
-          <p:cNvPr id="2" name="Picture 1" descr="slide-03.png"/>
+          <p:cNvPr id="2" name="Picture 1" descr="slide-02.png"/>
           <p:cNvPicPr>
             <a:picLocks noChangeAspect="1"/>
           </p:cNvPicPr>
@@ -3568,7 +3654,7 @@
       <p:grpSpPr/>
       <p:pic>
         <p:nvPicPr>
-          <p:cNvPr id="2" name="Picture 1" descr="slide-04.png"/>
+          <p:cNvPr id="2" name="Picture 1" descr="slide-03.png"/>
           <p:cNvPicPr>
             <a:picLocks noChangeAspect="1"/>
           </p:cNvPicPr>
@@ -3610,7 +3696,7 @@
       <p:grpSpPr/>
       <p:pic>
         <p:nvPicPr>
-          <p:cNvPr id="2" name="Picture 1" descr="slide-05.png"/>
+          <p:cNvPr id="2" name="Picture 1" descr="slide-04.png"/>
           <p:cNvPicPr>
             <a:picLocks noChangeAspect="1"/>
           </p:cNvPicPr>
@@ -3652,7 +3738,7 @@
       <p:grpSpPr/>
       <p:pic>
         <p:nvPicPr>
-          <p:cNvPr id="2" name="Picture 1" descr="slide-06.png"/>
+          <p:cNvPr id="2" name="Picture 1" descr="slide-05.png"/>
           <p:cNvPicPr>
             <a:picLocks noChangeAspect="1"/>
           </p:cNvPicPr>
@@ -3694,7 +3780,7 @@
       <p:grpSpPr/>
       <p:pic>
         <p:nvPicPr>
-          <p:cNvPr id="2" name="Picture 1" descr="slide-07.png"/>
+          <p:cNvPr id="2" name="Picture 1" descr="slide-06.png"/>
           <p:cNvPicPr>
             <a:picLocks noChangeAspect="1"/>
           </p:cNvPicPr>
@@ -3736,7 +3822,7 @@
       <p:grpSpPr/>
       <p:pic>
         <p:nvPicPr>
-          <p:cNvPr id="2" name="Picture 1" descr="slide-08.png"/>
+          <p:cNvPr id="2" name="Picture 1" descr="slide-07.png"/>
           <p:cNvPicPr>
             <a:picLocks noChangeAspect="1"/>
           </p:cNvPicPr>
@@ -3778,7 +3864,7 @@
       <p:grpSpPr/>
       <p:pic>
         <p:nvPicPr>
-          <p:cNvPr id="2" name="Picture 1" descr="slide-09.png"/>
+          <p:cNvPr id="2" name="Picture 1" descr="slide-08.png"/>
           <p:cNvPicPr>
             <a:picLocks noChangeAspect="1"/>
           </p:cNvPicPr>
